--- a/ppt/IoTAI15-PCA.pptx
+++ b/ppt/IoTAI15-PCA.pptx
@@ -3938,7 +3938,7 @@
           <a:p>
             <a:r>
               <a:rPr lang="fr-FR" dirty="0"/>
-              <a:t>Il est possible de fusionner toutes les méthodes vues</a:t>
+              <a:t>Il est possible de fusionner toutes les méthodes</a:t>
             </a:r>
           </a:p>
           <a:p>
